--- a/データ更新用/更新方法（野鳥HP）.pptx
+++ b/データ更新用/更新方法（野鳥HP）.pptx
@@ -6,6 +6,7 @@
   </p:sldMasterIdLst>
   <p:sldIdLst>
     <p:sldId id="257" r:id="rId2"/>
+    <p:sldId id="258" r:id="rId3"/>
   </p:sldIdLst>
   <p:sldSz cx="9144000" cy="6858000" type="screen4x3"/>
   <p:notesSz cx="6858000" cy="9144000"/>
@@ -104,7 +105,49 @@
       </a:defRPr>
     </a:lvl9pPr>
   </p:defaultTextStyle>
+  <p:extLst>
+    <p:ext uri="{EFAFB233-063F-42B5-8137-9DF3F51BA10A}">
+      <p15:sldGuideLst xmlns:p15="http://schemas.microsoft.com/office/powerpoint/2012/main"/>
+    </p:ext>
+  </p:extLst>
 </p:presentation>
+</file>
+
+<file path=ppt/changesInfos/changesInfo1.xml><?xml version="1.0" encoding="utf-8"?>
+<pc:chgInfo xmlns:a="http://schemas.openxmlformats.org/drawingml/2006/main" xmlns:r="http://schemas.openxmlformats.org/officeDocument/2006/relationships" xmlns:ac="http://schemas.microsoft.com/office/drawing/2013/main/command" xmlns:pc="http://schemas.microsoft.com/office/powerpoint/2013/main/command">
+  <pc:docChgLst>
+    <pc:chgData name="公佑 岩瀬" userId="0cfc74c0a86ff0d4" providerId="LiveId" clId="{7013677E-84BF-4BBD-B719-B565949FE887}"/>
+    <pc:docChg chg="undo custSel addSld modSld">
+      <pc:chgData name="公佑 岩瀬" userId="0cfc74c0a86ff0d4" providerId="LiveId" clId="{7013677E-84BF-4BBD-B719-B565949FE887}" dt="2026-04-23T03:04:59.795" v="71" actId="20577"/>
+      <pc:docMkLst>
+        <pc:docMk/>
+      </pc:docMkLst>
+      <pc:sldChg chg="delSp modSp new mod">
+        <pc:chgData name="公佑 岩瀬" userId="0cfc74c0a86ff0d4" providerId="LiveId" clId="{7013677E-84BF-4BBD-B719-B565949FE887}" dt="2026-04-23T03:04:59.795" v="71" actId="20577"/>
+        <pc:sldMkLst>
+          <pc:docMk/>
+          <pc:sldMk cId="3325403297" sldId="258"/>
+        </pc:sldMkLst>
+        <pc:spChg chg="del">
+          <ac:chgData name="公佑 岩瀬" userId="0cfc74c0a86ff0d4" providerId="LiveId" clId="{7013677E-84BF-4BBD-B719-B565949FE887}" dt="2026-04-23T03:03:14.963" v="3" actId="478"/>
+          <ac:spMkLst>
+            <pc:docMk/>
+            <pc:sldMk cId="3325403297" sldId="258"/>
+            <ac:spMk id="2" creationId="{9C98AE1B-3B91-0E20-549F-A73AB69203E8}"/>
+          </ac:spMkLst>
+        </pc:spChg>
+        <pc:spChg chg="mod">
+          <ac:chgData name="公佑 岩瀬" userId="0cfc74c0a86ff0d4" providerId="LiveId" clId="{7013677E-84BF-4BBD-B719-B565949FE887}" dt="2026-04-23T03:04:59.795" v="71" actId="20577"/>
+          <ac:spMkLst>
+            <pc:docMk/>
+            <pc:sldMk cId="3325403297" sldId="258"/>
+            <ac:spMk id="3" creationId="{28754D6C-322D-3948-38E8-28FE72478DD5}"/>
+          </ac:spMkLst>
+        </pc:spChg>
+      </pc:sldChg>
+    </pc:docChg>
+  </pc:docChgLst>
+</pc:chgInfo>
 </file>
 
 <file path=ppt/slideLayouts/slideLayout1.xml><?xml version="1.0" encoding="utf-8"?>
@@ -238,7 +281,7 @@
           <a:p>
             <a:fld id="{4FBD5874-81E0-467A-A9D8-5914A7A76144}" type="datetimeFigureOut">
               <a:rPr kumimoji="1" lang="ja-JP" altLang="en-US" smtClean="0"/>
-              <a:t>2026/3/21</a:t>
+              <a:t>2026/4/23</a:t>
             </a:fld>
             <a:endParaRPr kumimoji="1" lang="ja-JP" altLang="en-US"/>
           </a:p>
@@ -440,7 +483,7 @@
           <a:p>
             <a:fld id="{4FBD5874-81E0-467A-A9D8-5914A7A76144}" type="datetimeFigureOut">
               <a:rPr kumimoji="1" lang="ja-JP" altLang="en-US" smtClean="0"/>
-              <a:t>2026/3/21</a:t>
+              <a:t>2026/4/23</a:t>
             </a:fld>
             <a:endParaRPr kumimoji="1" lang="ja-JP" altLang="en-US"/>
           </a:p>
@@ -652,7 +695,7 @@
           <a:p>
             <a:fld id="{4FBD5874-81E0-467A-A9D8-5914A7A76144}" type="datetimeFigureOut">
               <a:rPr kumimoji="1" lang="ja-JP" altLang="en-US" smtClean="0"/>
-              <a:t>2026/3/21</a:t>
+              <a:t>2026/4/23</a:t>
             </a:fld>
             <a:endParaRPr kumimoji="1" lang="ja-JP" altLang="en-US"/>
           </a:p>
@@ -854,7 +897,7 @@
           <a:p>
             <a:fld id="{4FBD5874-81E0-467A-A9D8-5914A7A76144}" type="datetimeFigureOut">
               <a:rPr kumimoji="1" lang="ja-JP" altLang="en-US" smtClean="0"/>
-              <a:t>2026/3/21</a:t>
+              <a:t>2026/4/23</a:t>
             </a:fld>
             <a:endParaRPr kumimoji="1" lang="ja-JP" altLang="en-US"/>
           </a:p>
@@ -1098,7 +1141,7 @@
           <a:p>
             <a:fld id="{4FBD5874-81E0-467A-A9D8-5914A7A76144}" type="datetimeFigureOut">
               <a:rPr kumimoji="1" lang="ja-JP" altLang="en-US" smtClean="0"/>
-              <a:t>2026/3/21</a:t>
+              <a:t>2026/4/23</a:t>
             </a:fld>
             <a:endParaRPr kumimoji="1" lang="ja-JP" altLang="en-US"/>
           </a:p>
@@ -1394,7 +1437,7 @@
           <a:p>
             <a:fld id="{4FBD5874-81E0-467A-A9D8-5914A7A76144}" type="datetimeFigureOut">
               <a:rPr kumimoji="1" lang="ja-JP" altLang="en-US" smtClean="0"/>
-              <a:t>2026/3/21</a:t>
+              <a:t>2026/4/23</a:t>
             </a:fld>
             <a:endParaRPr kumimoji="1" lang="ja-JP" altLang="en-US"/>
           </a:p>
@@ -1825,7 +1868,7 @@
           <a:p>
             <a:fld id="{4FBD5874-81E0-467A-A9D8-5914A7A76144}" type="datetimeFigureOut">
               <a:rPr kumimoji="1" lang="ja-JP" altLang="en-US" smtClean="0"/>
-              <a:t>2026/3/21</a:t>
+              <a:t>2026/4/23</a:t>
             </a:fld>
             <a:endParaRPr kumimoji="1" lang="ja-JP" altLang="en-US"/>
           </a:p>
@@ -1943,7 +1986,7 @@
           <a:p>
             <a:fld id="{4FBD5874-81E0-467A-A9D8-5914A7A76144}" type="datetimeFigureOut">
               <a:rPr kumimoji="1" lang="ja-JP" altLang="en-US" smtClean="0"/>
-              <a:t>2026/3/21</a:t>
+              <a:t>2026/4/23</a:t>
             </a:fld>
             <a:endParaRPr kumimoji="1" lang="ja-JP" altLang="en-US"/>
           </a:p>
@@ -2038,7 +2081,7 @@
           <a:p>
             <a:fld id="{4FBD5874-81E0-467A-A9D8-5914A7A76144}" type="datetimeFigureOut">
               <a:rPr kumimoji="1" lang="ja-JP" altLang="en-US" smtClean="0"/>
-              <a:t>2026/3/21</a:t>
+              <a:t>2026/4/23</a:t>
             </a:fld>
             <a:endParaRPr kumimoji="1" lang="ja-JP" altLang="en-US"/>
           </a:p>
@@ -2347,7 +2390,7 @@
           <a:p>
             <a:fld id="{4FBD5874-81E0-467A-A9D8-5914A7A76144}" type="datetimeFigureOut">
               <a:rPr kumimoji="1" lang="ja-JP" altLang="en-US" smtClean="0"/>
-              <a:t>2026/3/21</a:t>
+              <a:t>2026/4/23</a:t>
             </a:fld>
             <a:endParaRPr kumimoji="1" lang="ja-JP" altLang="en-US"/>
           </a:p>
@@ -2604,7 +2647,7 @@
           <a:p>
             <a:fld id="{4FBD5874-81E0-467A-A9D8-5914A7A76144}" type="datetimeFigureOut">
               <a:rPr kumimoji="1" lang="ja-JP" altLang="en-US" smtClean="0"/>
-              <a:t>2026/3/21</a:t>
+              <a:t>2026/4/23</a:t>
             </a:fld>
             <a:endParaRPr kumimoji="1" lang="ja-JP" altLang="en-US"/>
           </a:p>
@@ -2849,7 +2892,7 @@
           <a:p>
             <a:fld id="{4FBD5874-81E0-467A-A9D8-5914A7A76144}" type="datetimeFigureOut">
               <a:rPr kumimoji="1" lang="ja-JP" altLang="en-US" smtClean="0"/>
-              <a:t>2026/3/21</a:t>
+              <a:t>2026/4/23</a:t>
             </a:fld>
             <a:endParaRPr kumimoji="1" lang="ja-JP" altLang="en-US"/>
           </a:p>
@@ -3513,6 +3556,500 @@
 </p:sld>
 </file>
 
+<file path=ppt/slides/slide2.xml><?xml version="1.0" encoding="utf-8"?>
+<p:sld xmlns:a="http://schemas.openxmlformats.org/drawingml/2006/main" xmlns:r="http://schemas.openxmlformats.org/officeDocument/2006/relationships" xmlns:p="http://schemas.openxmlformats.org/presentationml/2006/main">
+  <p:cSld>
+    <p:spTree>
+      <p:nvGrpSpPr>
+        <p:cNvPr id="1" name=""/>
+        <p:cNvGrpSpPr/>
+        <p:nvPr/>
+      </p:nvGrpSpPr>
+      <p:grpSpPr>
+        <a:xfrm>
+          <a:off x="0" y="0"/>
+          <a:ext cx="0" cy="0"/>
+          <a:chOff x="0" y="0"/>
+          <a:chExt cx="0" cy="0"/>
+        </a:xfrm>
+      </p:grpSpPr>
+      <p:sp>
+        <p:nvSpPr>
+          <p:cNvPr id="3" name="コンテンツ プレースホルダー 2">
+            <a:extLst>
+              <a:ext uri="{FF2B5EF4-FFF2-40B4-BE49-F238E27FC236}">
+                <a16:creationId xmlns:a16="http://schemas.microsoft.com/office/drawing/2014/main" id="{28754D6C-322D-3948-38E8-28FE72478DD5}"/>
+              </a:ext>
+            </a:extLst>
+          </p:cNvPr>
+          <p:cNvSpPr>
+            <a:spLocks noGrp="1"/>
+          </p:cNvSpPr>
+          <p:nvPr>
+            <p:ph idx="1"/>
+          </p:nvPr>
+        </p:nvSpPr>
+        <p:spPr>
+          <a:xfrm>
+            <a:off x="238032" y="218766"/>
+            <a:ext cx="7886700" cy="4351338"/>
+          </a:xfrm>
+        </p:spPr>
+        <p:txBody>
+          <a:bodyPr>
+            <a:normAutofit fontScale="25000" lnSpcReduction="20000"/>
+          </a:bodyPr>
+          <a:lstStyle/>
+          <a:p>
+            <a:pPr marL="0" indent="0">
+              <a:buNone/>
+            </a:pPr>
+            <a:r>
+              <a:rPr lang="ja-JP" altLang="en-US" b="1" dirty="0"/>
+              <a:t>🌐 公開</a:t>
+            </a:r>
+            <a:r>
+              <a:rPr lang="en-US" altLang="ja-JP" b="1" dirty="0"/>
+              <a:t>URL</a:t>
+            </a:r>
+            <a:r>
+              <a:rPr lang="ja-JP" altLang="en-US" b="1" dirty="0"/>
+              <a:t>について　</a:t>
+            </a:r>
+            <a:r>
+              <a:rPr lang="ja-JP" altLang="en-US" dirty="0"/>
+              <a:t>あなたの</a:t>
+            </a:r>
+            <a:r>
+              <a:rPr lang="en-US" altLang="ja-JP" dirty="0"/>
+              <a:t>URL</a:t>
+            </a:r>
+            <a:r>
+              <a:rPr lang="ja-JP" altLang="en-US" dirty="0"/>
+              <a:t>👇　</a:t>
+            </a:r>
+            <a:r>
+              <a:rPr lang="en-US" altLang="ja-JP" dirty="0"/>
+              <a:t>https://bird-site-re.pages.dev/</a:t>
+            </a:r>
+            <a:br>
+              <a:rPr lang="ja-JP" altLang="en-US" dirty="0"/>
+            </a:br>
+            <a:endParaRPr lang="ja-JP" altLang="en-US" dirty="0"/>
+          </a:p>
+          <a:p>
+            <a:pPr marL="0" indent="0">
+              <a:buNone/>
+            </a:pPr>
+            <a:r>
+              <a:rPr lang="ja-JP" altLang="en-US" b="1" dirty="0"/>
+              <a:t>🔄 今後の更新方法（超重要）</a:t>
+            </a:r>
+          </a:p>
+          <a:p>
+            <a:pPr marL="0" indent="0">
+              <a:buNone/>
+            </a:pPr>
+            <a:r>
+              <a:rPr lang="ja-JP" altLang="en-US" dirty="0"/>
+              <a:t>あなたの構成は👉 </a:t>
+            </a:r>
+            <a:r>
+              <a:rPr lang="en-US" altLang="ja-JP" dirty="0"/>
+              <a:t>CSV → </a:t>
+            </a:r>
+            <a:r>
+              <a:rPr lang="ja-JP" altLang="en-US" dirty="0"/>
+              <a:t>サイトに反映なので、運用はめちゃくちゃ簡単です。</a:t>
+            </a:r>
+            <a:br>
+              <a:rPr lang="ja-JP" altLang="en-US" dirty="0"/>
+            </a:br>
+            <a:endParaRPr lang="ja-JP" altLang="en-US" dirty="0"/>
+          </a:p>
+          <a:p>
+            <a:pPr marL="0" indent="0">
+              <a:buNone/>
+            </a:pPr>
+            <a:r>
+              <a:rPr lang="ja-JP" altLang="en-US" b="1" dirty="0"/>
+              <a:t>🧭 更新の流れ（これだけ覚えれば</a:t>
+            </a:r>
+            <a:r>
+              <a:rPr lang="en-US" altLang="ja-JP" b="1" dirty="0"/>
+              <a:t>OK</a:t>
+            </a:r>
+            <a:r>
+              <a:rPr lang="ja-JP" altLang="en-US" b="1" dirty="0"/>
+              <a:t>）</a:t>
+            </a:r>
+          </a:p>
+          <a:p>
+            <a:pPr marL="0" indent="0">
+              <a:buNone/>
+            </a:pPr>
+            <a:r>
+              <a:rPr lang="ja-JP" altLang="en-US" b="1" dirty="0"/>
+              <a:t>① </a:t>
+            </a:r>
+            <a:r>
+              <a:rPr lang="en-US" altLang="ja-JP" b="1" dirty="0"/>
+              <a:t>CSV</a:t>
+            </a:r>
+            <a:r>
+              <a:rPr lang="ja-JP" altLang="en-US" b="1" dirty="0"/>
+              <a:t>を編集</a:t>
+            </a:r>
+          </a:p>
+          <a:p>
+            <a:pPr marL="0" indent="0">
+              <a:buNone/>
+            </a:pPr>
+            <a:r>
+              <a:rPr lang="ja-JP" altLang="en-US" dirty="0"/>
+              <a:t>場所👇</a:t>
+            </a:r>
+          </a:p>
+          <a:p>
+            <a:pPr marL="0" indent="0">
+              <a:buNone/>
+            </a:pPr>
+            <a:r>
+              <a:rPr lang="en-US" altLang="ja-JP" dirty="0"/>
+              <a:t>C:\Users\iwase\OneDrive\</a:t>
+            </a:r>
+            <a:r>
+              <a:rPr lang="ja-JP" altLang="en-US" dirty="0"/>
+              <a:t>デスクトップ</a:t>
+            </a:r>
+            <a:r>
+              <a:rPr lang="en-US" altLang="ja-JP" dirty="0"/>
+              <a:t>\bird-site\</a:t>
+            </a:r>
+            <a:r>
+              <a:rPr lang="ja-JP" altLang="en-US" dirty="0"/>
+              <a:t>データ更新用</a:t>
+            </a:r>
+            <a:r>
+              <a:rPr lang="en-US" altLang="ja-JP" dirty="0"/>
+              <a:t>\</a:t>
+            </a:r>
+            <a:r>
+              <a:rPr lang="ja-JP" altLang="en-US" dirty="0"/>
+              <a:t>野鳥データ（岩瀬）</a:t>
+            </a:r>
+            <a:r>
+              <a:rPr lang="en-US" altLang="ja-JP" dirty="0"/>
+              <a:t>.csv</a:t>
+            </a:r>
+          </a:p>
+          <a:p>
+            <a:pPr marL="0" indent="0">
+              <a:buNone/>
+            </a:pPr>
+            <a:r>
+              <a:rPr lang="ja-JP" altLang="en-US" dirty="0"/>
+              <a:t>👉 </a:t>
+            </a:r>
+            <a:r>
+              <a:rPr lang="en-US" altLang="ja-JP" dirty="0"/>
+              <a:t>Excel</a:t>
+            </a:r>
+            <a:r>
+              <a:rPr lang="ja-JP" altLang="en-US" dirty="0"/>
+              <a:t>で開いて編集</a:t>
+            </a:r>
+            <a:br>
+              <a:rPr lang="ja-JP" altLang="en-US" dirty="0"/>
+            </a:br>
+            <a:endParaRPr lang="ja-JP" altLang="en-US" dirty="0"/>
+          </a:p>
+          <a:p>
+            <a:pPr marL="0" indent="0">
+              <a:buNone/>
+            </a:pPr>
+            <a:r>
+              <a:rPr lang="ja-JP" altLang="en-US" b="1" dirty="0"/>
+              <a:t>② 保存</a:t>
+            </a:r>
+          </a:p>
+          <a:p>
+            <a:pPr marL="0" indent="0">
+              <a:buNone/>
+            </a:pPr>
+            <a:r>
+              <a:rPr lang="ja-JP" altLang="en-US" dirty="0"/>
+              <a:t>そのまま上書き保存</a:t>
+            </a:r>
+            <a:br>
+              <a:rPr lang="ja-JP" altLang="en-US" dirty="0"/>
+            </a:br>
+            <a:endParaRPr lang="ja-JP" altLang="en-US" dirty="0"/>
+          </a:p>
+          <a:p>
+            <a:pPr marL="0" indent="0">
+              <a:buNone/>
+            </a:pPr>
+            <a:r>
+              <a:rPr lang="ja-JP" altLang="en-US" b="1" dirty="0"/>
+              <a:t>③ </a:t>
+            </a:r>
+            <a:r>
+              <a:rPr lang="en-US" altLang="ja-JP" b="1" dirty="0"/>
+              <a:t>GitHub</a:t>
+            </a:r>
+            <a:r>
+              <a:rPr lang="ja-JP" altLang="en-US" b="1" dirty="0"/>
+              <a:t>に反映</a:t>
+            </a:r>
+          </a:p>
+          <a:p>
+            <a:pPr marL="0" indent="0">
+              <a:buNone/>
+            </a:pPr>
+            <a:r>
+              <a:rPr lang="en-US" altLang="ja-JP" dirty="0"/>
+              <a:t>VS Code </a:t>
+            </a:r>
+            <a:r>
+              <a:rPr lang="ja-JP" altLang="en-US" dirty="0"/>
+              <a:t>のターミナルで👇</a:t>
+            </a:r>
+          </a:p>
+          <a:p>
+            <a:pPr marL="0" indent="0">
+              <a:buNone/>
+            </a:pPr>
+            <a:r>
+              <a:rPr lang="en-US" altLang="ja-JP" dirty="0"/>
+              <a:t>git add .</a:t>
+            </a:r>
+            <a:br>
+              <a:rPr lang="en-US" altLang="ja-JP" dirty="0"/>
+            </a:br>
+            <a:r>
+              <a:rPr lang="en-US" altLang="ja-JP" dirty="0"/>
+              <a:t>git commit -m "</a:t>
+            </a:r>
+            <a:r>
+              <a:rPr lang="ja-JP" altLang="en-US" dirty="0"/>
+              <a:t>データ更新</a:t>
+            </a:r>
+            <a:r>
+              <a:rPr lang="en-US" altLang="ja-JP" dirty="0"/>
+              <a:t>"</a:t>
+            </a:r>
+            <a:br>
+              <a:rPr lang="en-US" altLang="ja-JP" dirty="0"/>
+            </a:br>
+            <a:r>
+              <a:rPr lang="en-US" altLang="ja-JP" dirty="0"/>
+              <a:t>git push</a:t>
+            </a:r>
+          </a:p>
+          <a:p>
+            <a:pPr marL="0" indent="0">
+              <a:buNone/>
+            </a:pPr>
+            <a:br>
+              <a:rPr lang="ja-JP" altLang="en-US" dirty="0"/>
+            </a:br>
+            <a:r>
+              <a:rPr lang="ja-JP" altLang="en-US" b="1" dirty="0"/>
+              <a:t>④ 自動で反映</a:t>
+            </a:r>
+          </a:p>
+          <a:p>
+            <a:pPr marL="0" indent="0">
+              <a:buNone/>
+            </a:pPr>
+            <a:r>
+              <a:rPr lang="ja-JP" altLang="en-US" dirty="0"/>
+              <a:t>👉 </a:t>
+            </a:r>
+            <a:r>
+              <a:rPr lang="en-US" altLang="ja-JP" dirty="0"/>
+              <a:t>Cloudflare</a:t>
+            </a:r>
+            <a:r>
+              <a:rPr lang="ja-JP" altLang="en-US" dirty="0"/>
+              <a:t>が自動で</a:t>
+            </a:r>
+          </a:p>
+          <a:p>
+            <a:pPr marL="0" indent="0">
+              <a:buNone/>
+            </a:pPr>
+            <a:r>
+              <a:rPr lang="en-US" altLang="ja-JP" dirty="0"/>
+              <a:t>build </a:t>
+            </a:r>
+          </a:p>
+          <a:p>
+            <a:pPr marL="0" indent="0">
+              <a:buNone/>
+            </a:pPr>
+            <a:r>
+              <a:rPr lang="en-US" altLang="ja-JP" dirty="0"/>
+              <a:t>deploy </a:t>
+            </a:r>
+          </a:p>
+          <a:p>
+            <a:pPr marL="0" indent="0">
+              <a:buNone/>
+            </a:pPr>
+            <a:r>
+              <a:rPr lang="ja-JP" altLang="en-US" dirty="0"/>
+              <a:t>を実行</a:t>
+            </a:r>
+          </a:p>
+          <a:p>
+            <a:pPr marL="0" indent="0">
+              <a:buNone/>
+            </a:pPr>
+            <a:br>
+              <a:rPr lang="ja-JP" altLang="en-US" dirty="0"/>
+            </a:br>
+            <a:r>
+              <a:rPr lang="ja-JP" altLang="en-US" b="1" dirty="0"/>
+              <a:t>⑤ 数十秒</a:t>
+            </a:r>
+            <a:r>
+              <a:rPr lang="en-US" altLang="ja-JP" b="1" dirty="0"/>
+              <a:t>〜1</a:t>
+            </a:r>
+            <a:r>
+              <a:rPr lang="ja-JP" altLang="en-US" b="1" dirty="0"/>
+              <a:t>分でサイト更新</a:t>
+            </a:r>
+          </a:p>
+          <a:p>
+            <a:pPr marL="0" indent="0">
+              <a:buNone/>
+            </a:pPr>
+            <a:r>
+              <a:rPr lang="ja-JP" altLang="en-US" dirty="0"/>
+              <a:t>👉 </a:t>
+            </a:r>
+            <a:r>
+              <a:rPr lang="en-US" altLang="ja-JP" dirty="0"/>
+              <a:t>URL</a:t>
+            </a:r>
+            <a:r>
+              <a:rPr lang="ja-JP" altLang="en-US" dirty="0"/>
+              <a:t>を開き直せば最新状態</a:t>
+            </a:r>
+            <a:br>
+              <a:rPr lang="ja-JP" altLang="en-US" dirty="0"/>
+            </a:br>
+            <a:endParaRPr lang="ja-JP" altLang="en-US" dirty="0"/>
+          </a:p>
+          <a:p>
+            <a:r>
+              <a:rPr lang="ja-JP" altLang="en-US" b="1" dirty="0"/>
+              <a:t>⚡ つまり</a:t>
+            </a:r>
+          </a:p>
+          <a:p>
+            <a:r>
+              <a:rPr lang="ja-JP" altLang="en-US" dirty="0"/>
+              <a:t>👉 </a:t>
+            </a:r>
+            <a:r>
+              <a:rPr lang="en-US" altLang="ja-JP" b="1" dirty="0"/>
+              <a:t>CSV</a:t>
+            </a:r>
+            <a:r>
+              <a:rPr lang="ja-JP" altLang="en-US" b="1" dirty="0"/>
+              <a:t>更新 → </a:t>
+            </a:r>
+            <a:r>
+              <a:rPr lang="en-US" altLang="ja-JP" b="1" dirty="0"/>
+              <a:t>push</a:t>
+            </a:r>
+            <a:r>
+              <a:rPr lang="ja-JP" altLang="en-US" b="1" dirty="0"/>
+              <a:t>するだけでサイト更新</a:t>
+            </a:r>
+            <a:endParaRPr lang="ja-JP" altLang="en-US" dirty="0"/>
+          </a:p>
+          <a:p>
+            <a:r>
+              <a:rPr lang="ja-JP" altLang="en-US" b="1" dirty="0"/>
+              <a:t>📸 写真の追加方法</a:t>
+            </a:r>
+          </a:p>
+          <a:p>
+            <a:r>
+              <a:rPr lang="ja-JP" altLang="en-US" b="1" dirty="0"/>
+              <a:t>保存場所</a:t>
+            </a:r>
+          </a:p>
+          <a:p>
+            <a:r>
+              <a:rPr lang="en-US" altLang="ja-JP" dirty="0"/>
+              <a:t>bird-site/public/images/birds/</a:t>
+            </a:r>
+          </a:p>
+          <a:p>
+            <a:r>
+              <a:rPr lang="ja-JP" altLang="en-US" dirty="0"/>
+              <a:t>例：</a:t>
+            </a:r>
+            <a:r>
+              <a:rPr lang="en-US" altLang="ja-JP" dirty="0"/>
+              <a:t>public/images/birds/yacho-001.jpg</a:t>
+            </a:r>
+            <a:br>
+              <a:rPr lang="ja-JP" altLang="en-US" dirty="0"/>
+            </a:br>
+            <a:endParaRPr lang="ja-JP" altLang="en-US" dirty="0"/>
+          </a:p>
+          <a:p>
+            <a:r>
+              <a:rPr lang="en-US" altLang="ja-JP" b="1" dirty="0"/>
+              <a:t>CSV</a:t>
+            </a:r>
+            <a:r>
+              <a:rPr lang="ja-JP" altLang="en-US" b="1" dirty="0"/>
+              <a:t>の</a:t>
+            </a:r>
+            <a:r>
+              <a:rPr lang="en-US" altLang="ja-JP" b="1" dirty="0"/>
+              <a:t>photo</a:t>
+            </a:r>
+            <a:r>
+              <a:rPr lang="ja-JP" altLang="en-US" b="1" dirty="0"/>
+              <a:t>欄</a:t>
+            </a:r>
+          </a:p>
+          <a:p>
+            <a:r>
+              <a:rPr lang="en-US" altLang="ja-JP" dirty="0"/>
+              <a:t>/images/birds/yacho-001.jpg</a:t>
+            </a:r>
+          </a:p>
+          <a:p>
+            <a:r>
+              <a:rPr lang="ja-JP" altLang="en-US" dirty="0"/>
+              <a:t>👉 これで表示される</a:t>
+            </a:r>
+          </a:p>
+        </p:txBody>
+      </p:sp>
+    </p:spTree>
+    <p:extLst>
+      <p:ext uri="{BB962C8B-B14F-4D97-AF65-F5344CB8AC3E}">
+        <p14:creationId xmlns:p14="http://schemas.microsoft.com/office/powerpoint/2010/main" val="3325403297"/>
+      </p:ext>
+    </p:extLst>
+  </p:cSld>
+  <p:clrMapOvr>
+    <a:masterClrMapping/>
+  </p:clrMapOvr>
+</p:sld>
+</file>
+
 <file path=ppt/theme/theme1.xml><?xml version="1.0" encoding="utf-8"?>
 <a:theme xmlns:a="http://schemas.openxmlformats.org/drawingml/2006/main" name="Office テーマ">
   <a:themeElements>

--- a/データ更新用/更新方法（野鳥HP）.pptx
+++ b/データ更新用/更新方法（野鳥HP）.pptx
@@ -118,12 +118,12 @@
   <pc:docChgLst>
     <pc:chgData name="公佑 岩瀬" userId="0cfc74c0a86ff0d4" providerId="LiveId" clId="{7013677E-84BF-4BBD-B719-B565949FE887}"/>
     <pc:docChg chg="undo custSel addSld modSld">
-      <pc:chgData name="公佑 岩瀬" userId="0cfc74c0a86ff0d4" providerId="LiveId" clId="{7013677E-84BF-4BBD-B719-B565949FE887}" dt="2026-04-23T03:04:59.795" v="71" actId="20577"/>
+      <pc:chgData name="公佑 岩瀬" userId="0cfc74c0a86ff0d4" providerId="LiveId" clId="{7013677E-84BF-4BBD-B719-B565949FE887}" dt="2026-04-23T03:26:33.846" v="73" actId="1076"/>
       <pc:docMkLst>
         <pc:docMk/>
       </pc:docMkLst>
-      <pc:sldChg chg="delSp modSp new mod">
-        <pc:chgData name="公佑 岩瀬" userId="0cfc74c0a86ff0d4" providerId="LiveId" clId="{7013677E-84BF-4BBD-B719-B565949FE887}" dt="2026-04-23T03:04:59.795" v="71" actId="20577"/>
+      <pc:sldChg chg="addSp delSp modSp new mod">
+        <pc:chgData name="公佑 岩瀬" userId="0cfc74c0a86ff0d4" providerId="LiveId" clId="{7013677E-84BF-4BBD-B719-B565949FE887}" dt="2026-04-23T03:26:33.846" v="73" actId="1076"/>
         <pc:sldMkLst>
           <pc:docMk/>
           <pc:sldMk cId="3325403297" sldId="258"/>
@@ -142,6 +142,14 @@
             <pc:docMk/>
             <pc:sldMk cId="3325403297" sldId="258"/>
             <ac:spMk id="3" creationId="{28754D6C-322D-3948-38E8-28FE72478DD5}"/>
+          </ac:spMkLst>
+        </pc:spChg>
+        <pc:spChg chg="add mod">
+          <ac:chgData name="公佑 岩瀬" userId="0cfc74c0a86ff0d4" providerId="LiveId" clId="{7013677E-84BF-4BBD-B719-B565949FE887}" dt="2026-04-23T03:26:33.846" v="73" actId="1076"/>
+          <ac:spMkLst>
+            <pc:docMk/>
+            <pc:sldMk cId="3325403297" sldId="258"/>
+            <ac:spMk id="5" creationId="{16810F8D-F250-24AE-A454-115E36AF498E}"/>
           </ac:spMkLst>
         </pc:spChg>
       </pc:sldChg>
@@ -4037,6 +4045,53 @@
           </a:p>
         </p:txBody>
       </p:sp>
+      <p:sp>
+        <p:nvSpPr>
+          <p:cNvPr id="5" name="テキスト ボックス 4">
+            <a:extLst>
+              <a:ext uri="{FF2B5EF4-FFF2-40B4-BE49-F238E27FC236}">
+                <a16:creationId xmlns:a16="http://schemas.microsoft.com/office/drawing/2014/main" id="{16810F8D-F250-24AE-A454-115E36AF498E}"/>
+              </a:ext>
+            </a:extLst>
+          </p:cNvPr>
+          <p:cNvSpPr txBox="1"/>
+          <p:nvPr/>
+        </p:nvSpPr>
+        <p:spPr>
+          <a:xfrm>
+            <a:off x="3060192" y="2845415"/>
+            <a:ext cx="4572000" cy="923330"/>
+          </a:xfrm>
+          <a:prstGeom prst="rect">
+            <a:avLst/>
+          </a:prstGeom>
+          <a:noFill/>
+        </p:spPr>
+        <p:txBody>
+          <a:bodyPr wrap="square">
+            <a:spAutoFit/>
+          </a:bodyPr>
+          <a:lstStyle/>
+          <a:p>
+            <a:r>
+              <a:rPr lang="ja-JP" altLang="en-US" dirty="0"/>
+              <a:t>git add .</a:t>
+            </a:r>
+          </a:p>
+          <a:p>
+            <a:r>
+              <a:rPr lang="ja-JP" altLang="en-US" dirty="0"/>
+              <a:t>git commit -m "データ更新"</a:t>
+            </a:r>
+          </a:p>
+          <a:p>
+            <a:r>
+              <a:rPr lang="ja-JP" altLang="en-US" dirty="0"/>
+              <a:t>git push</a:t>
+            </a:r>
+          </a:p>
+        </p:txBody>
+      </p:sp>
     </p:spTree>
     <p:extLst>
       <p:ext uri="{BB962C8B-B14F-4D97-AF65-F5344CB8AC3E}">

--- a/データ更新用/更新方法（野鳥HP）.pptx
+++ b/データ更新用/更新方法（野鳥HP）.pptx
@@ -118,22 +118,22 @@
   <pc:docChgLst>
     <pc:chgData name="公佑 岩瀬" userId="0cfc74c0a86ff0d4" providerId="LiveId" clId="{7013677E-84BF-4BBD-B719-B565949FE887}"/>
     <pc:docChg chg="undo custSel addSld modSld">
-      <pc:chgData name="公佑 岩瀬" userId="0cfc74c0a86ff0d4" providerId="LiveId" clId="{7013677E-84BF-4BBD-B719-B565949FE887}" dt="2026-04-23T03:26:33.846" v="73" actId="1076"/>
+      <pc:chgData name="公佑 岩瀬" userId="0cfc74c0a86ff0d4" providerId="LiveId" clId="{7013677E-84BF-4BBD-B719-B565949FE887}" dt="2026-05-04T14:13:36.898" v="299" actId="20577"/>
       <pc:docMkLst>
         <pc:docMk/>
       </pc:docMkLst>
       <pc:sldChg chg="addSp delSp modSp new mod">
-        <pc:chgData name="公佑 岩瀬" userId="0cfc74c0a86ff0d4" providerId="LiveId" clId="{7013677E-84BF-4BBD-B719-B565949FE887}" dt="2026-04-23T03:26:33.846" v="73" actId="1076"/>
+        <pc:chgData name="公佑 岩瀬" userId="0cfc74c0a86ff0d4" providerId="LiveId" clId="{7013677E-84BF-4BBD-B719-B565949FE887}" dt="2026-05-04T14:13:36.898" v="299" actId="20577"/>
         <pc:sldMkLst>
           <pc:docMk/>
           <pc:sldMk cId="3325403297" sldId="258"/>
         </pc:sldMkLst>
-        <pc:spChg chg="del">
-          <ac:chgData name="公佑 岩瀬" userId="0cfc74c0a86ff0d4" providerId="LiveId" clId="{7013677E-84BF-4BBD-B719-B565949FE887}" dt="2026-04-23T03:03:14.963" v="3" actId="478"/>
+        <pc:spChg chg="add mod">
+          <ac:chgData name="公佑 岩瀬" userId="0cfc74c0a86ff0d4" providerId="LiveId" clId="{7013677E-84BF-4BBD-B719-B565949FE887}" dt="2026-05-04T14:13:36.898" v="299" actId="20577"/>
           <ac:spMkLst>
             <pc:docMk/>
             <pc:sldMk cId="3325403297" sldId="258"/>
-            <ac:spMk id="2" creationId="{9C98AE1B-3B91-0E20-549F-A73AB69203E8}"/>
+            <ac:spMk id="2" creationId="{8FF9DEF4-F7DD-7FFC-B5B0-E9013B293ACE}"/>
           </ac:spMkLst>
         </pc:spChg>
         <pc:spChg chg="mod">
@@ -289,7 +289,7 @@
           <a:p>
             <a:fld id="{4FBD5874-81E0-467A-A9D8-5914A7A76144}" type="datetimeFigureOut">
               <a:rPr kumimoji="1" lang="ja-JP" altLang="en-US" smtClean="0"/>
-              <a:t>2026/4/23</a:t>
+              <a:t>2026/5/4</a:t>
             </a:fld>
             <a:endParaRPr kumimoji="1" lang="ja-JP" altLang="en-US"/>
           </a:p>
@@ -491,7 +491,7 @@
           <a:p>
             <a:fld id="{4FBD5874-81E0-467A-A9D8-5914A7A76144}" type="datetimeFigureOut">
               <a:rPr kumimoji="1" lang="ja-JP" altLang="en-US" smtClean="0"/>
-              <a:t>2026/4/23</a:t>
+              <a:t>2026/5/4</a:t>
             </a:fld>
             <a:endParaRPr kumimoji="1" lang="ja-JP" altLang="en-US"/>
           </a:p>
@@ -703,7 +703,7 @@
           <a:p>
             <a:fld id="{4FBD5874-81E0-467A-A9D8-5914A7A76144}" type="datetimeFigureOut">
               <a:rPr kumimoji="1" lang="ja-JP" altLang="en-US" smtClean="0"/>
-              <a:t>2026/4/23</a:t>
+              <a:t>2026/5/4</a:t>
             </a:fld>
             <a:endParaRPr kumimoji="1" lang="ja-JP" altLang="en-US"/>
           </a:p>
@@ -905,7 +905,7 @@
           <a:p>
             <a:fld id="{4FBD5874-81E0-467A-A9D8-5914A7A76144}" type="datetimeFigureOut">
               <a:rPr kumimoji="1" lang="ja-JP" altLang="en-US" smtClean="0"/>
-              <a:t>2026/4/23</a:t>
+              <a:t>2026/5/4</a:t>
             </a:fld>
             <a:endParaRPr kumimoji="1" lang="ja-JP" altLang="en-US"/>
           </a:p>
@@ -1149,7 +1149,7 @@
           <a:p>
             <a:fld id="{4FBD5874-81E0-467A-A9D8-5914A7A76144}" type="datetimeFigureOut">
               <a:rPr kumimoji="1" lang="ja-JP" altLang="en-US" smtClean="0"/>
-              <a:t>2026/4/23</a:t>
+              <a:t>2026/5/4</a:t>
             </a:fld>
             <a:endParaRPr kumimoji="1" lang="ja-JP" altLang="en-US"/>
           </a:p>
@@ -1445,7 +1445,7 @@
           <a:p>
             <a:fld id="{4FBD5874-81E0-467A-A9D8-5914A7A76144}" type="datetimeFigureOut">
               <a:rPr kumimoji="1" lang="ja-JP" altLang="en-US" smtClean="0"/>
-              <a:t>2026/4/23</a:t>
+              <a:t>2026/5/4</a:t>
             </a:fld>
             <a:endParaRPr kumimoji="1" lang="ja-JP" altLang="en-US"/>
           </a:p>
@@ -1876,7 +1876,7 @@
           <a:p>
             <a:fld id="{4FBD5874-81E0-467A-A9D8-5914A7A76144}" type="datetimeFigureOut">
               <a:rPr kumimoji="1" lang="ja-JP" altLang="en-US" smtClean="0"/>
-              <a:t>2026/4/23</a:t>
+              <a:t>2026/5/4</a:t>
             </a:fld>
             <a:endParaRPr kumimoji="1" lang="ja-JP" altLang="en-US"/>
           </a:p>
@@ -1994,7 +1994,7 @@
           <a:p>
             <a:fld id="{4FBD5874-81E0-467A-A9D8-5914A7A76144}" type="datetimeFigureOut">
               <a:rPr kumimoji="1" lang="ja-JP" altLang="en-US" smtClean="0"/>
-              <a:t>2026/4/23</a:t>
+              <a:t>2026/5/4</a:t>
             </a:fld>
             <a:endParaRPr kumimoji="1" lang="ja-JP" altLang="en-US"/>
           </a:p>
@@ -2089,7 +2089,7 @@
           <a:p>
             <a:fld id="{4FBD5874-81E0-467A-A9D8-5914A7A76144}" type="datetimeFigureOut">
               <a:rPr kumimoji="1" lang="ja-JP" altLang="en-US" smtClean="0"/>
-              <a:t>2026/4/23</a:t>
+              <a:t>2026/5/4</a:t>
             </a:fld>
             <a:endParaRPr kumimoji="1" lang="ja-JP" altLang="en-US"/>
           </a:p>
@@ -2398,7 +2398,7 @@
           <a:p>
             <a:fld id="{4FBD5874-81E0-467A-A9D8-5914A7A76144}" type="datetimeFigureOut">
               <a:rPr kumimoji="1" lang="ja-JP" altLang="en-US" smtClean="0"/>
-              <a:t>2026/4/23</a:t>
+              <a:t>2026/5/4</a:t>
             </a:fld>
             <a:endParaRPr kumimoji="1" lang="ja-JP" altLang="en-US"/>
           </a:p>
@@ -2655,7 +2655,7 @@
           <a:p>
             <a:fld id="{4FBD5874-81E0-467A-A9D8-5914A7A76144}" type="datetimeFigureOut">
               <a:rPr kumimoji="1" lang="ja-JP" altLang="en-US" smtClean="0"/>
-              <a:t>2026/4/23</a:t>
+              <a:t>2026/5/4</a:t>
             </a:fld>
             <a:endParaRPr kumimoji="1" lang="ja-JP" altLang="en-US"/>
           </a:p>
@@ -2900,7 +2900,7 @@
           <a:p>
             <a:fld id="{4FBD5874-81E0-467A-A9D8-5914A7A76144}" type="datetimeFigureOut">
               <a:rPr kumimoji="1" lang="ja-JP" altLang="en-US" smtClean="0"/>
-              <a:t>2026/4/23</a:t>
+              <a:t>2026/5/4</a:t>
             </a:fld>
             <a:endParaRPr kumimoji="1" lang="ja-JP" altLang="en-US"/>
           </a:p>
@@ -4092,6 +4092,101 @@
           </a:p>
         </p:txBody>
       </p:sp>
+      <p:sp>
+        <p:nvSpPr>
+          <p:cNvPr id="2" name="テキスト ボックス 1">
+            <a:extLst>
+              <a:ext uri="{FF2B5EF4-FFF2-40B4-BE49-F238E27FC236}">
+                <a16:creationId xmlns:a16="http://schemas.microsoft.com/office/drawing/2014/main" id="{8FF9DEF4-F7DD-7FFC-B5B0-E9013B293ACE}"/>
+              </a:ext>
+            </a:extLst>
+          </p:cNvPr>
+          <p:cNvSpPr txBox="1"/>
+          <p:nvPr/>
+        </p:nvSpPr>
+        <p:spPr>
+          <a:xfrm>
+            <a:off x="3060192" y="4108439"/>
+            <a:ext cx="4572000" cy="1477328"/>
+          </a:xfrm>
+          <a:prstGeom prst="rect">
+            <a:avLst/>
+          </a:prstGeom>
+          <a:noFill/>
+        </p:spPr>
+        <p:txBody>
+          <a:bodyPr wrap="square">
+            <a:spAutoFit/>
+          </a:bodyPr>
+          <a:lstStyle/>
+          <a:p>
+            <a:r>
+              <a:rPr lang="ja-JP" altLang="en-US" dirty="0"/>
+              <a:t>①</a:t>
+            </a:r>
+            <a:r>
+              <a:rPr lang="en-US" altLang="ja-JP" dirty="0"/>
+              <a:t>Visual Studio Code</a:t>
+            </a:r>
+          </a:p>
+          <a:p>
+            <a:r>
+              <a:rPr lang="en-US" altLang="ja-JP" dirty="0"/>
+              <a:t>Bird-site</a:t>
+            </a:r>
+            <a:r>
+              <a:rPr lang="ja-JP" altLang="en-US" dirty="0"/>
+              <a:t>上の</a:t>
+            </a:r>
+            <a:r>
+              <a:rPr lang="en-US" altLang="ja-JP" dirty="0" err="1"/>
+              <a:t>Teriminal</a:t>
+            </a:r>
+            <a:r>
+              <a:rPr lang="ja-JP" altLang="en-US" dirty="0"/>
+              <a:t>に上記指示を入力</a:t>
+            </a:r>
+            <a:endParaRPr lang="en-US" altLang="ja-JP" dirty="0"/>
+          </a:p>
+          <a:p>
+            <a:r>
+              <a:rPr lang="ja-JP" altLang="en-US" dirty="0"/>
+              <a:t>②</a:t>
+            </a:r>
+            <a:r>
+              <a:rPr lang="en-US" altLang="ja-JP" dirty="0"/>
+              <a:t>Cloud flare</a:t>
+            </a:r>
+            <a:r>
+              <a:rPr lang="ja-JP" altLang="en-US" dirty="0"/>
+              <a:t>にログイン</a:t>
+            </a:r>
+            <a:endParaRPr lang="en-US" altLang="ja-JP" dirty="0"/>
+          </a:p>
+          <a:p>
+            <a:r>
+              <a:rPr lang="ja-JP" altLang="en-US" dirty="0"/>
+              <a:t>（</a:t>
+            </a:r>
+            <a:r>
+              <a:rPr lang="en-US" altLang="ja-JP" dirty="0"/>
+              <a:t>Git-Hub</a:t>
+            </a:r>
+            <a:r>
+              <a:rPr lang="ja-JP" altLang="en-US" dirty="0"/>
+              <a:t>連携）</a:t>
+            </a:r>
+            <a:endParaRPr lang="en-US" altLang="ja-JP" dirty="0"/>
+          </a:p>
+          <a:p>
+            <a:r>
+              <a:rPr lang="ja-JP" altLang="en-US"/>
+              <a:t>③ロックセトリミメモリーに反映</a:t>
+            </a:r>
+            <a:endParaRPr lang="ja-JP" altLang="en-US" dirty="0"/>
+          </a:p>
+        </p:txBody>
+      </p:sp>
     </p:spTree>
     <p:extLst>
       <p:ext uri="{BB962C8B-B14F-4D97-AF65-F5344CB8AC3E}">
